--- a/PPTs/Ch3_ARM_ISA_Exercises ANS.pptx
+++ b/PPTs/Ch3_ARM_ISA_Exercises ANS.pptx
@@ -8610,7 +8610,7 @@
                   <a:prstClr val="black"/>
                 </a:solidFill>
               </a:rPr>
-              <a:t>Q: Assume a byte-addressable memory with a data bus that is 32 bits (4 bytes) wide. Consider 16 bytes of memory (addresses 0 to 15) arranged as four 32-bit words (4 bytes each). </a:t>
+              <a:t>Q: Assume a byte-addressable memory with a data bus that is 32 bits (4 bytes) wide. Consider 16 bytes of memory (addresses 96 to 111) arranged as four 32-bit words (4 bytes each). </a:t>
             </a:r>
           </a:p>
           <a:p>
@@ -8621,7 +8621,7 @@
                   <a:prstClr val="black"/>
                 </a:solidFill>
               </a:rPr>
-              <a:t>(a) What is the address of the most significant byte of the word at address 102, , assuming Little-Endian ordering?</a:t>
+              <a:t>(a) What is the address of the most significant byte of the word at address 102, assuming Little-Endian ordering?</a:t>
             </a:r>
           </a:p>
           <a:p>
@@ -8632,7 +8632,7 @@
                   <a:prstClr val="black"/>
                 </a:solidFill>
               </a:rPr>
-              <a:t>(b) What is the address of the most significant byte of the word at address 102, , assuming Little-Endian ordering?</a:t>
+              <a:t>(b) What is the address of the most significant byte of the word at address 102, assuming Big-Endian ordering?</a:t>
             </a:r>
           </a:p>
           <a:p>
@@ -8643,7 +8643,7 @@
                   <a:prstClr val="black"/>
                 </a:solidFill>
               </a:rPr>
-              <a:t>(b) How many memory cycles are required to read the word at address 102?</a:t>
+              <a:t>(c) How many memory cycles are required to read the word at address 102?</a:t>
             </a:r>
           </a:p>
           <a:p>
@@ -8654,7 +8654,7 @@
                   <a:prstClr val="black"/>
                 </a:solidFill>
               </a:rPr>
-              <a:t>(c) How many memory cycles are required to read the half word at address 102?</a:t>
+              <a:t>(d) How many memory cycles are required to read the half word at address 102?</a:t>
             </a:r>
           </a:p>
           <a:p>
@@ -8987,7 +8987,7 @@
                   <a:prstClr val="black"/>
                 </a:solidFill>
               </a:rPr>
-              <a:t>Q: Assume a byte-addressable memory with a data bus that is 32 bits (4 bytes) wide. Consider 16 bytes of memory (addresses 0 to 15) arranged as four 32-bit words (4 bytes each). </a:t>
+              <a:t>Q: Assume a byte-addressable memory with a data bus that is 32 bits (4 bytes) wide. </a:t>
             </a:r>
             <a:r>
               <a:rPr lang="en-US" altLang="zh-CN" sz="1600" dirty="0">
@@ -11549,7 +11549,24 @@
                   <a:prstClr val="black"/>
                 </a:solidFill>
               </a:rPr>
-              <a:t>(c) longs</a:t>
+              <a:t>(d) longs (32-bit ARM/Cortex-M: long = 4 bytes)</a:t>
+            </a:r>
+            <a:endParaRPr lang="en-US" sz="1600" dirty="0">
+              <a:solidFill>
+                <a:prstClr val="black"/>
+              </a:solidFill>
+              <a:latin typeface="Calibri"/>
+            </a:endParaRPr>
+          </a:p>
+          <a:p>
+            <a:pPr marL="657225" lvl="1" indent="-257175" defTabSz="342900"/>
+            <a:r>
+              <a:rPr lang="en-US" sz="1600" dirty="0">
+                <a:solidFill>
+                  <a:prstClr val="black"/>
+                </a:solidFill>
+              </a:rPr>
+              <a:t>(e) long longs (8 bytes)</a:t>
             </a:r>
             <a:endParaRPr lang="en-US" sz="1600" dirty="0">
               <a:solidFill>
@@ -12079,7 +12096,18 @@
                   <a:prstClr val="black"/>
                 </a:solidFill>
               </a:rPr>
-              <a:t>(c) longs</a:t>
+              <a:t>(d) longs (32-bit ARM/Cortex-M: long = 4 bytes)</a:t>
+            </a:r>
+          </a:p>
+          <a:p>
+            <a:pPr marL="657225" lvl="1" indent="-257175" defTabSz="342900"/>
+            <a:r>
+              <a:rPr lang="en-US" sz="1600" dirty="0">
+                <a:solidFill>
+                  <a:prstClr val="black"/>
+                </a:solidFill>
+              </a:rPr>
+              <a:t>(e) long longs (8 bytes)</a:t>
             </a:r>
           </a:p>
           <a:p>
@@ -12255,39 +12283,18 @@
                   <a:prstClr val="black"/>
                 </a:solidFill>
               </a:rPr>
-              <a:t>(c) longs: 0</a:t>
-            </a:r>
-            <a:r>
-              <a:rPr lang="en-US" altLang="zh-CN" sz="1600" dirty="0">
+              <a:t>(d) longs: 0x12345678+4 = 0x1234567C</a:t>
+            </a:r>
+          </a:p>
+          <a:p>
+            <a:pPr marL="657225" lvl="1" indent="-257175" defTabSz="342900"/>
+            <a:r>
+              <a:rPr lang="en-US" sz="1600" dirty="0">
                 <a:solidFill>
                   <a:prstClr val="black"/>
                 </a:solidFill>
               </a:rPr>
-              <a:t>x</a:t>
-            </a:r>
-            <a:r>
-              <a:rPr lang="en-US" sz="1600" dirty="0">
-                <a:solidFill>
-                  <a:prstClr val="black"/>
-                </a:solidFill>
-              </a:rPr>
-              <a:t>12345678+8= 0</a:t>
-            </a:r>
-            <a:r>
-              <a:rPr lang="en-US" altLang="zh-CN" sz="1600" dirty="0">
-                <a:solidFill>
-                  <a:prstClr val="black"/>
-                </a:solidFill>
-              </a:rPr>
-              <a:t>x</a:t>
-            </a:r>
-            <a:r>
-              <a:rPr lang="en-US" sz="1600" dirty="0">
-                <a:solidFill>
-                  <a:prstClr val="black"/>
-                </a:solidFill>
-              </a:rPr>
-              <a:t>12345680</a:t>
+              <a:t>(e) long longs: 0x12345678+8 = 0x12345680</a:t>
             </a:r>
           </a:p>
           <a:p>
@@ -20321,7 +20328,7 @@
                 <a:ea typeface="+mn-ea"/>
                 <a:cs typeface="+mn-cs"/>
               </a:rPr>
-              <a:t>What are the memory address of these four words?</a:t>
+              <a:t>What are the memory addresses of these four words?</a:t>
             </a:r>
           </a:p>
         </p:txBody>
@@ -23713,7 +23720,7 @@
                   <a:cs typeface="Courier New" charset="0"/>
                   <a:sym typeface="Courier New" charset="0"/>
                 </a:rPr>
-                <a:t>0x0012</a:t>
+                <a:t>0x000C</a:t>
               </a:r>
               <a:endParaRPr kumimoji="0" lang="en-US" sz="1300" b="1" i="0" u="none" strike="noStrike" kern="1200" cap="none" spc="0" normalizeH="0" baseline="0" noProof="0" dirty="0">
                 <a:ln>
@@ -24987,7 +24994,7 @@
                 <a:ea typeface="+mn-ea"/>
                 <a:cs typeface="+mn-cs"/>
               </a:rPr>
-              <a:t>What are the memory address of these four words?</a:t>
+              <a:t>What are the memory addresses of these four words?</a:t>
             </a:r>
           </a:p>
           <a:p>
@@ -29003,7 +29010,7 @@
                   <a:prstClr val="black"/>
                 </a:solidFill>
               </a:rPr>
-              <a:t>Q: Assume a byte-addressable memory with a data bus that is 32 bits (4 bytes) wide. Consider 16 bytes of memory (addresses 0 to 15) arranged as four 32-bit words (4 bytes each). </a:t>
+              <a:t>Q: Assume a byte-addressable memory with a data bus that is 32 bits (4 bytes) wide. Consider 16 bytes of memory (addresses 96 to 111) arranged as four 32-bit words (4 bytes each). </a:t>
             </a:r>
           </a:p>
           <a:p>
@@ -29014,7 +29021,7 @@
                   <a:prstClr val="black"/>
                 </a:solidFill>
               </a:rPr>
-              <a:t>(a) What is the address of the most significant byte of the word at address 102, , assuming Little-Endian ordering?</a:t>
+              <a:t>(a) What is the address of the most significant byte of the word at address 102, assuming Little-Endian ordering?</a:t>
             </a:r>
           </a:p>
           <a:p>
@@ -29025,7 +29032,7 @@
                   <a:prstClr val="black"/>
                 </a:solidFill>
               </a:rPr>
-              <a:t>(b) What is the address of the most significant byte of the word at address 102, , </a:t>
+              <a:t>(b) What is the address of the most significant byte of the word at address 102, </a:t>
             </a:r>
             <a:r>
               <a:rPr lang="en-US" sz="1400">
@@ -29033,7 +29040,7 @@
                   <a:prstClr val="black"/>
                 </a:solidFill>
               </a:rPr>
-              <a:t>assuming Little-Endian </a:t>
+              <a:t>assuming Big-Endian </a:t>
             </a:r>
             <a:r>
               <a:rPr lang="en-US" sz="1400" dirty="0">
@@ -29052,7 +29059,7 @@
                   <a:prstClr val="black"/>
                 </a:solidFill>
               </a:rPr>
-              <a:t>(b) How many memory cycles are required to read the word at address 102?</a:t>
+              <a:t>(c) How many memory cycles are required to read the word at address 102?</a:t>
             </a:r>
           </a:p>
           <a:p>
@@ -29063,7 +29070,7 @@
                   <a:prstClr val="black"/>
                 </a:solidFill>
               </a:rPr>
-              <a:t>(c) How many memory cycles are required to read the half word at address 102?</a:t>
+              <a:t>(d) How many memory cycles are required to read the half word at address 102?</a:t>
             </a:r>
           </a:p>
           <a:p>
